--- a/MedML/Encefalorgrams/Presentation/Encefalograms.pptx
+++ b/MedML/Encefalorgrams/Presentation/Encefalograms.pptx
@@ -6,31 +6,30 @@
     <p:sldMasterId id="2147483677" r:id="rId2"/>
   </p:sldMasterIdLst>
   <p:notesMasterIdLst>
-    <p:notesMasterId r:id="rId15"/>
+    <p:notesMasterId r:id="rId14"/>
   </p:notesMasterIdLst>
   <p:sldIdLst>
     <p:sldId id="256" r:id="rId3"/>
     <p:sldId id="257" r:id="rId4"/>
     <p:sldId id="404" r:id="rId5"/>
     <p:sldId id="259" r:id="rId6"/>
-    <p:sldId id="260" r:id="rId7"/>
-    <p:sldId id="261" r:id="rId8"/>
-    <p:sldId id="263" r:id="rId9"/>
-    <p:sldId id="405" r:id="rId10"/>
-    <p:sldId id="296" r:id="rId11"/>
-    <p:sldId id="297" r:id="rId12"/>
-    <p:sldId id="299" r:id="rId13"/>
-    <p:sldId id="298" r:id="rId14"/>
+    <p:sldId id="261" r:id="rId7"/>
+    <p:sldId id="263" r:id="rId8"/>
+    <p:sldId id="405" r:id="rId9"/>
+    <p:sldId id="296" r:id="rId10"/>
+    <p:sldId id="297" r:id="rId11"/>
+    <p:sldId id="299" r:id="rId12"/>
+    <p:sldId id="298" r:id="rId13"/>
   </p:sldIdLst>
   <p:sldSz cx="9144000" cy="5143500" type="screen16x9"/>
   <p:notesSz cx="6858000" cy="9144000"/>
   <p:embeddedFontLst>
     <p:embeddedFont>
       <p:font typeface="Roboto" panose="02000000000000000000" pitchFamily="2" charset="0"/>
-      <p:regular r:id="rId16"/>
-      <p:bold r:id="rId17"/>
-      <p:italic r:id="rId18"/>
-      <p:boldItalic r:id="rId19"/>
+      <p:regular r:id="rId15"/>
+      <p:bold r:id="rId16"/>
+      <p:italic r:id="rId17"/>
+      <p:boldItalic r:id="rId18"/>
     </p:embeddedFont>
   </p:embeddedFontLst>
   <p:defaultTextStyle>
@@ -836,110 +835,6 @@
   <p:cSld>
     <p:spTree>
       <p:nvGrpSpPr>
-        <p:cNvPr id="1" name="Shape 486"/>
-        <p:cNvGrpSpPr/>
-        <p:nvPr/>
-      </p:nvGrpSpPr>
-      <p:grpSpPr>
-        <a:xfrm>
-          <a:off x="0" y="0"/>
-          <a:ext cx="0" cy="0"/>
-          <a:chOff x="0" y="0"/>
-          <a:chExt cx="0" cy="0"/>
-        </a:xfrm>
-      </p:grpSpPr>
-      <p:sp>
-        <p:nvSpPr>
-          <p:cNvPr id="487" name="Google Shape;487;gdf6222e6af_0_23:notes"/>
-          <p:cNvSpPr>
-            <a:spLocks noGrp="1" noRot="1" noChangeAspect="1"/>
-          </p:cNvSpPr>
-          <p:nvPr>
-            <p:ph type="sldImg" idx="2"/>
-          </p:nvPr>
-        </p:nvSpPr>
-        <p:spPr>
-          <a:xfrm>
-            <a:off x="381000" y="685800"/>
-            <a:ext cx="6096000" cy="3429000"/>
-          </a:xfrm>
-          <a:custGeom>
-            <a:avLst/>
-            <a:gdLst/>
-            <a:ahLst/>
-            <a:cxnLst/>
-            <a:rect l="l" t="t" r="r" b="b"/>
-            <a:pathLst>
-              <a:path w="120000" h="120000" extrusionOk="0">
-                <a:moveTo>
-                  <a:pt x="0" y="0"/>
-                </a:moveTo>
-                <a:lnTo>
-                  <a:pt x="120000" y="0"/>
-                </a:lnTo>
-                <a:lnTo>
-                  <a:pt x="120000" y="120000"/>
-                </a:lnTo>
-                <a:lnTo>
-                  <a:pt x="0" y="120000"/>
-                </a:lnTo>
-                <a:close/>
-              </a:path>
-            </a:pathLst>
-          </a:custGeom>
-        </p:spPr>
-      </p:sp>
-      <p:sp>
-        <p:nvSpPr>
-          <p:cNvPr id="488" name="Google Shape;488;gdf6222e6af_0_23:notes"/>
-          <p:cNvSpPr txBox="1">
-            <a:spLocks noGrp="1"/>
-          </p:cNvSpPr>
-          <p:nvPr>
-            <p:ph type="body" idx="1"/>
-          </p:nvPr>
-        </p:nvSpPr>
-        <p:spPr>
-          <a:xfrm>
-            <a:off x="685800" y="4343400"/>
-            <a:ext cx="5486400" cy="4114800"/>
-          </a:xfrm>
-          <a:prstGeom prst="rect">
-            <a:avLst/>
-          </a:prstGeom>
-        </p:spPr>
-        <p:txBody>
-          <a:bodyPr spcFirstLastPara="1" wrap="square" lIns="91425" tIns="91425" rIns="91425" bIns="91425" anchor="t" anchorCtr="0">
-            <a:noAutofit/>
-          </a:bodyPr>
-          <a:lstStyle/>
-          <a:p>
-            <a:pPr marL="0" lvl="0" indent="0" algn="l" rtl="0">
-              <a:spcBef>
-                <a:spcPts val="0"/>
-              </a:spcBef>
-              <a:spcAft>
-                <a:spcPts val="0"/>
-              </a:spcAft>
-              <a:buNone/>
-            </a:pPr>
-            <a:endParaRPr/>
-          </a:p>
-        </p:txBody>
-      </p:sp>
-    </p:spTree>
-  </p:cSld>
-  <p:clrMapOvr>
-    <a:masterClrMapping/>
-  </p:clrMapOvr>
-</p:notes>
-</file>
-
-<file path=ppt/notesSlides/notesSlide11.xml><?xml version="1.0" encoding="utf-8"?>
-<p:notes xmlns:a="http://schemas.openxmlformats.org/drawingml/2006/main" xmlns:r="http://schemas.openxmlformats.org/officeDocument/2006/relationships" xmlns:p="http://schemas.openxmlformats.org/presentationml/2006/main" showMasterSp="0" showMasterPhAnim="0">
-  <p:cSld>
-    <p:spTree>
-      <p:nvGrpSpPr>
         <p:cNvPr id="1" name="Shape 505"/>
         <p:cNvGrpSpPr/>
         <p:nvPr/>
@@ -1039,7 +934,7 @@
 </p:notes>
 </file>
 
-<file path=ppt/notesSlides/notesSlide12.xml><?xml version="1.0" encoding="utf-8"?>
+<file path=ppt/notesSlides/notesSlide11.xml><?xml version="1.0" encoding="utf-8"?>
 <p:notes xmlns:a="http://schemas.openxmlformats.org/drawingml/2006/main" xmlns:r="http://schemas.openxmlformats.org/officeDocument/2006/relationships" xmlns:p="http://schemas.openxmlformats.org/presentationml/2006/main" showMasterSp="0" showMasterPhAnim="0">
   <p:cSld>
     <p:spTree>
@@ -1460,110 +1355,6 @@
   <p:cSld>
     <p:spTree>
       <p:nvGrpSpPr>
-        <p:cNvPr id="1" name="Shape 177"/>
-        <p:cNvGrpSpPr/>
-        <p:nvPr/>
-      </p:nvGrpSpPr>
-      <p:grpSpPr>
-        <a:xfrm>
-          <a:off x="0" y="0"/>
-          <a:ext cx="0" cy="0"/>
-          <a:chOff x="0" y="0"/>
-          <a:chExt cx="0" cy="0"/>
-        </a:xfrm>
-      </p:grpSpPr>
-      <p:sp>
-        <p:nvSpPr>
-          <p:cNvPr id="178" name="Google Shape;178;g2e349ae73d2_0_95:notes"/>
-          <p:cNvSpPr>
-            <a:spLocks noGrp="1" noRot="1" noChangeAspect="1"/>
-          </p:cNvSpPr>
-          <p:nvPr>
-            <p:ph type="sldImg" idx="2"/>
-          </p:nvPr>
-        </p:nvSpPr>
-        <p:spPr>
-          <a:xfrm>
-            <a:off x="381000" y="685800"/>
-            <a:ext cx="6096000" cy="3429000"/>
-          </a:xfrm>
-          <a:custGeom>
-            <a:avLst/>
-            <a:gdLst/>
-            <a:ahLst/>
-            <a:cxnLst/>
-            <a:rect l="l" t="t" r="r" b="b"/>
-            <a:pathLst>
-              <a:path w="120000" h="120000" extrusionOk="0">
-                <a:moveTo>
-                  <a:pt x="0" y="0"/>
-                </a:moveTo>
-                <a:lnTo>
-                  <a:pt x="120000" y="0"/>
-                </a:lnTo>
-                <a:lnTo>
-                  <a:pt x="120000" y="120000"/>
-                </a:lnTo>
-                <a:lnTo>
-                  <a:pt x="0" y="120000"/>
-                </a:lnTo>
-                <a:close/>
-              </a:path>
-            </a:pathLst>
-          </a:custGeom>
-        </p:spPr>
-      </p:sp>
-      <p:sp>
-        <p:nvSpPr>
-          <p:cNvPr id="179" name="Google Shape;179;g2e349ae73d2_0_95:notes"/>
-          <p:cNvSpPr txBox="1">
-            <a:spLocks noGrp="1"/>
-          </p:cNvSpPr>
-          <p:nvPr>
-            <p:ph type="body" idx="1"/>
-          </p:nvPr>
-        </p:nvSpPr>
-        <p:spPr>
-          <a:xfrm>
-            <a:off x="685800" y="4343400"/>
-            <a:ext cx="5486400" cy="4114800"/>
-          </a:xfrm>
-          <a:prstGeom prst="rect">
-            <a:avLst/>
-          </a:prstGeom>
-        </p:spPr>
-        <p:txBody>
-          <a:bodyPr spcFirstLastPara="1" wrap="square" lIns="91425" tIns="91425" rIns="91425" bIns="91425" anchor="t" anchorCtr="0">
-            <a:noAutofit/>
-          </a:bodyPr>
-          <a:lstStyle/>
-          <a:p>
-            <a:pPr marL="0" lvl="0" indent="0" algn="l" rtl="0">
-              <a:spcBef>
-                <a:spcPts val="0"/>
-              </a:spcBef>
-              <a:spcAft>
-                <a:spcPts val="0"/>
-              </a:spcAft>
-              <a:buNone/>
-            </a:pPr>
-            <a:endParaRPr/>
-          </a:p>
-        </p:txBody>
-      </p:sp>
-    </p:spTree>
-  </p:cSld>
-  <p:clrMapOvr>
-    <a:masterClrMapping/>
-  </p:clrMapOvr>
-</p:notes>
-</file>
-
-<file path=ppt/notesSlides/notesSlide6.xml><?xml version="1.0" encoding="utf-8"?>
-<p:notes xmlns:a="http://schemas.openxmlformats.org/drawingml/2006/main" xmlns:r="http://schemas.openxmlformats.org/officeDocument/2006/relationships" xmlns:p="http://schemas.openxmlformats.org/presentationml/2006/main" showMasterSp="0" showMasterPhAnim="0">
-  <p:cSld>
-    <p:spTree>
-      <p:nvGrpSpPr>
         <p:cNvPr id="1" name="Shape 194"/>
         <p:cNvGrpSpPr/>
         <p:nvPr/>
@@ -1663,7 +1454,7 @@
 </p:notes>
 </file>
 
-<file path=ppt/notesSlides/notesSlide7.xml><?xml version="1.0" encoding="utf-8"?>
+<file path=ppt/notesSlides/notesSlide6.xml><?xml version="1.0" encoding="utf-8"?>
 <p:notes xmlns:a="http://schemas.openxmlformats.org/drawingml/2006/main" xmlns:r="http://schemas.openxmlformats.org/officeDocument/2006/relationships" xmlns:p="http://schemas.openxmlformats.org/presentationml/2006/main" showMasterSp="0" showMasterPhAnim="0">
   <p:cSld>
     <p:spTree>
@@ -1767,7 +1558,7 @@
 </p:notes>
 </file>
 
-<file path=ppt/notesSlides/notesSlide8.xml><?xml version="1.0" encoding="utf-8"?>
+<file path=ppt/notesSlides/notesSlide7.xml><?xml version="1.0" encoding="utf-8"?>
 <p:notes xmlns:a="http://schemas.openxmlformats.org/drawingml/2006/main" xmlns:r="http://schemas.openxmlformats.org/officeDocument/2006/relationships" xmlns:p="http://schemas.openxmlformats.org/presentationml/2006/main" showMasterSp="0" showMasterPhAnim="0">
   <p:cSld>
     <p:spTree>
@@ -1871,7 +1662,7 @@
 </p:notes>
 </file>
 
-<file path=ppt/notesSlides/notesSlide9.xml><?xml version="1.0" encoding="utf-8"?>
+<file path=ppt/notesSlides/notesSlide8.xml><?xml version="1.0" encoding="utf-8"?>
 <p:notes xmlns:a="http://schemas.openxmlformats.org/drawingml/2006/main" xmlns:r="http://schemas.openxmlformats.org/officeDocument/2006/relationships" xmlns:p="http://schemas.openxmlformats.org/presentationml/2006/main" showMasterSp="0" showMasterPhAnim="0">
   <p:cSld>
     <p:spTree>
@@ -1932,6 +1723,110 @@
       <p:sp>
         <p:nvSpPr>
           <p:cNvPr id="479" name="Google Shape;479;g18a1909ca36_0_68:notes"/>
+          <p:cNvSpPr txBox="1">
+            <a:spLocks noGrp="1"/>
+          </p:cNvSpPr>
+          <p:nvPr>
+            <p:ph type="body" idx="1"/>
+          </p:nvPr>
+        </p:nvSpPr>
+        <p:spPr>
+          <a:xfrm>
+            <a:off x="685800" y="4343400"/>
+            <a:ext cx="5486400" cy="4114800"/>
+          </a:xfrm>
+          <a:prstGeom prst="rect">
+            <a:avLst/>
+          </a:prstGeom>
+        </p:spPr>
+        <p:txBody>
+          <a:bodyPr spcFirstLastPara="1" wrap="square" lIns="91425" tIns="91425" rIns="91425" bIns="91425" anchor="t" anchorCtr="0">
+            <a:noAutofit/>
+          </a:bodyPr>
+          <a:lstStyle/>
+          <a:p>
+            <a:pPr marL="0" lvl="0" indent="0" algn="l" rtl="0">
+              <a:spcBef>
+                <a:spcPts val="0"/>
+              </a:spcBef>
+              <a:spcAft>
+                <a:spcPts val="0"/>
+              </a:spcAft>
+              <a:buNone/>
+            </a:pPr>
+            <a:endParaRPr/>
+          </a:p>
+        </p:txBody>
+      </p:sp>
+    </p:spTree>
+  </p:cSld>
+  <p:clrMapOvr>
+    <a:masterClrMapping/>
+  </p:clrMapOvr>
+</p:notes>
+</file>
+
+<file path=ppt/notesSlides/notesSlide9.xml><?xml version="1.0" encoding="utf-8"?>
+<p:notes xmlns:a="http://schemas.openxmlformats.org/drawingml/2006/main" xmlns:r="http://schemas.openxmlformats.org/officeDocument/2006/relationships" xmlns:p="http://schemas.openxmlformats.org/presentationml/2006/main" showMasterSp="0" showMasterPhAnim="0">
+  <p:cSld>
+    <p:spTree>
+      <p:nvGrpSpPr>
+        <p:cNvPr id="1" name="Shape 486"/>
+        <p:cNvGrpSpPr/>
+        <p:nvPr/>
+      </p:nvGrpSpPr>
+      <p:grpSpPr>
+        <a:xfrm>
+          <a:off x="0" y="0"/>
+          <a:ext cx="0" cy="0"/>
+          <a:chOff x="0" y="0"/>
+          <a:chExt cx="0" cy="0"/>
+        </a:xfrm>
+      </p:grpSpPr>
+      <p:sp>
+        <p:nvSpPr>
+          <p:cNvPr id="487" name="Google Shape;487;gdf6222e6af_0_23:notes"/>
+          <p:cNvSpPr>
+            <a:spLocks noGrp="1" noRot="1" noChangeAspect="1"/>
+          </p:cNvSpPr>
+          <p:nvPr>
+            <p:ph type="sldImg" idx="2"/>
+          </p:nvPr>
+        </p:nvSpPr>
+        <p:spPr>
+          <a:xfrm>
+            <a:off x="381000" y="685800"/>
+            <a:ext cx="6096000" cy="3429000"/>
+          </a:xfrm>
+          <a:custGeom>
+            <a:avLst/>
+            <a:gdLst/>
+            <a:ahLst/>
+            <a:cxnLst/>
+            <a:rect l="l" t="t" r="r" b="b"/>
+            <a:pathLst>
+              <a:path w="120000" h="120000" extrusionOk="0">
+                <a:moveTo>
+                  <a:pt x="0" y="0"/>
+                </a:moveTo>
+                <a:lnTo>
+                  <a:pt x="120000" y="0"/>
+                </a:lnTo>
+                <a:lnTo>
+                  <a:pt x="120000" y="120000"/>
+                </a:lnTo>
+                <a:lnTo>
+                  <a:pt x="0" y="120000"/>
+                </a:lnTo>
+                <a:close/>
+              </a:path>
+            </a:pathLst>
+          </a:custGeom>
+        </p:spPr>
+      </p:sp>
+      <p:sp>
+        <p:nvSpPr>
+          <p:cNvPr id="488" name="Google Shape;488;gdf6222e6af_0_23:notes"/>
           <p:cNvSpPr txBox="1">
             <a:spLocks noGrp="1"/>
           </p:cNvSpPr>
@@ -16204,73 +16099,6 @@
   <p:cSld>
     <p:spTree>
       <p:nvGrpSpPr>
-        <p:cNvPr id="1" name="Shape 489"/>
-        <p:cNvGrpSpPr/>
-        <p:nvPr/>
-      </p:nvGrpSpPr>
-      <p:grpSpPr>
-        <a:xfrm>
-          <a:off x="0" y="0"/>
-          <a:ext cx="0" cy="0"/>
-          <a:chOff x="0" y="0"/>
-          <a:chExt cx="0" cy="0"/>
-        </a:xfrm>
-      </p:grpSpPr>
-      <p:sp>
-        <p:nvSpPr>
-          <p:cNvPr id="490" name="Google Shape;490;p72"/>
-          <p:cNvSpPr txBox="1">
-            <a:spLocks noGrp="1"/>
-          </p:cNvSpPr>
-          <p:nvPr>
-            <p:ph type="title"/>
-          </p:nvPr>
-        </p:nvSpPr>
-        <p:spPr>
-          <a:xfrm>
-            <a:off x="651425" y="396394"/>
-            <a:ext cx="7706100" cy="4090800"/>
-          </a:xfrm>
-          <a:prstGeom prst="rect">
-            <a:avLst/>
-          </a:prstGeom>
-        </p:spPr>
-        <p:txBody>
-          <a:bodyPr spcFirstLastPara="1" wrap="square" lIns="91425" tIns="91425" rIns="91425" bIns="91425" anchor="ctr" anchorCtr="0">
-            <a:noAutofit/>
-          </a:bodyPr>
-          <a:lstStyle/>
-          <a:p>
-            <a:pPr marL="0" lvl="0" indent="0" algn="l" rtl="0">
-              <a:spcBef>
-                <a:spcPts val="0"/>
-              </a:spcBef>
-              <a:spcAft>
-                <a:spcPts val="0"/>
-              </a:spcAft>
-              <a:buNone/>
-            </a:pPr>
-            <a:r>
-              <a:rPr lang="ru"/>
-              <a:t>Рефлексия</a:t>
-            </a:r>
-            <a:endParaRPr/>
-          </a:p>
-        </p:txBody>
-      </p:sp>
-    </p:spTree>
-  </p:cSld>
-  <p:clrMapOvr>
-    <a:masterClrMapping/>
-  </p:clrMapOvr>
-</p:sld>
-</file>
-
-<file path=ppt/slides/slide11.xml><?xml version="1.0" encoding="utf-8"?>
-<p:sld xmlns:a="http://schemas.openxmlformats.org/drawingml/2006/main" xmlns:r="http://schemas.openxmlformats.org/officeDocument/2006/relationships" xmlns:p="http://schemas.openxmlformats.org/presentationml/2006/main">
-  <p:cSld>
-    <p:spTree>
-      <p:nvGrpSpPr>
         <p:cNvPr id="1" name="Shape 508"/>
         <p:cNvGrpSpPr/>
         <p:nvPr/>
@@ -16370,7 +16198,7 @@
 </p:sld>
 </file>
 
-<file path=ppt/slides/slide12.xml><?xml version="1.0" encoding="utf-8"?>
+<file path=ppt/slides/slide11.xml><?xml version="1.0" encoding="utf-8"?>
 <p:sld xmlns:a="http://schemas.openxmlformats.org/drawingml/2006/main" xmlns:r="http://schemas.openxmlformats.org/officeDocument/2006/relationships" xmlns:p="http://schemas.openxmlformats.org/presentationml/2006/main">
   <p:cSld>
     <p:spTree>
@@ -16431,14 +16259,14 @@
       </p:sp>
       <p:sp>
         <p:nvSpPr>
-          <p:cNvPr id="496" name="Google Shape;496;p73"/>
+          <p:cNvPr id="497" name="Google Shape;497;p73"/>
           <p:cNvSpPr txBox="1"/>
           <p:nvPr/>
         </p:nvSpPr>
         <p:spPr>
           <a:xfrm>
-            <a:off x="1915425" y="1502825"/>
-            <a:ext cx="6825300" cy="415500"/>
+            <a:off x="1929073" y="1461347"/>
+            <a:ext cx="6156900" cy="569356"/>
           </a:xfrm>
           <a:prstGeom prst="rect">
             <a:avLst/>
@@ -16464,65 +16292,19 @@
               <a:buNone/>
             </a:pPr>
             <a:r>
-              <a:rPr lang="ru" sz="1500" dirty="0">
-                <a:solidFill>
-                  <a:srgbClr val="FF9900"/>
+              <a:rPr lang="ru-RU" sz="2500" b="1" dirty="0">
+                <a:solidFill>
+                  <a:srgbClr val="050505"/>
                 </a:solidFill>
                 <a:latin typeface="Roboto"/>
                 <a:ea typeface="Roboto"/>
                 <a:cs typeface="Roboto"/>
                 <a:sym typeface="Roboto"/>
               </a:rPr>
-              <a:t>04 июля 2024</a:t>
+              <a:t>Кейс: </a:t>
             </a:r>
-            <a:endParaRPr sz="1500" dirty="0">
-              <a:solidFill>
-                <a:srgbClr val="FF9900"/>
-              </a:solidFill>
-              <a:latin typeface="Roboto"/>
-              <a:ea typeface="Roboto"/>
-              <a:cs typeface="Roboto"/>
-              <a:sym typeface="Roboto"/>
-            </a:endParaRPr>
-          </a:p>
-        </p:txBody>
-      </p:sp>
-      <p:sp>
-        <p:nvSpPr>
-          <p:cNvPr id="497" name="Google Shape;497;p73"/>
-          <p:cNvSpPr txBox="1"/>
-          <p:nvPr/>
-        </p:nvSpPr>
-        <p:spPr>
-          <a:xfrm>
-            <a:off x="1915425" y="1826708"/>
-            <a:ext cx="6156900" cy="954077"/>
-          </a:xfrm>
-          <a:prstGeom prst="rect">
-            <a:avLst/>
-          </a:prstGeom>
-          <a:noFill/>
-          <a:ln>
-            <a:noFill/>
-          </a:ln>
-        </p:spPr>
-        <p:txBody>
-          <a:bodyPr spcFirstLastPara="1" wrap="square" lIns="91425" tIns="91425" rIns="91425" bIns="91425" anchor="t" anchorCtr="0">
-            <a:spAutoFit/>
-          </a:bodyPr>
-          <a:lstStyle/>
-          <a:p>
-            <a:pPr marL="0" lvl="0" indent="0" algn="l" rtl="0">
-              <a:spcBef>
-                <a:spcPts val="0"/>
-              </a:spcBef>
-              <a:spcAft>
-                <a:spcPts val="0"/>
-              </a:spcAft>
-              <a:buNone/>
-            </a:pPr>
             <a:r>
-              <a:rPr lang="ru-RU" sz="2500" b="1" dirty="0">
+              <a:rPr lang="ru-RU" sz="2500" b="1" dirty="0" err="1">
                 <a:solidFill>
                   <a:srgbClr val="050505"/>
                 </a:solidFill>
@@ -16531,7 +16313,19 @@
                 <a:cs typeface="Roboto"/>
                 <a:sym typeface="Roboto"/>
               </a:rPr>
-              <a:t>Кейс: Анализ генетических последовательностей</a:t>
+              <a:t>Омиксные</a:t>
+            </a:r>
+            <a:r>
+              <a:rPr lang="ru-RU" sz="2500" b="1" dirty="0">
+                <a:solidFill>
+                  <a:srgbClr val="050505"/>
+                </a:solidFill>
+                <a:latin typeface="Roboto"/>
+                <a:ea typeface="Roboto"/>
+                <a:cs typeface="Roboto"/>
+                <a:sym typeface="Roboto"/>
+              </a:rPr>
+              <a:t> данные</a:t>
             </a:r>
             <a:endParaRPr sz="2400" b="1" dirty="0">
               <a:solidFill>
@@ -18211,8 +18005,8 @@
         </p:nvSpPr>
         <p:spPr>
           <a:xfrm>
-            <a:off x="1654525" y="2049300"/>
-            <a:ext cx="2475300" cy="877200"/>
+            <a:off x="1654525" y="2178555"/>
+            <a:ext cx="2475300" cy="646300"/>
           </a:xfrm>
           <a:prstGeom prst="rect">
             <a:avLst/>
@@ -18238,7 +18032,7 @@
               <a:buNone/>
             </a:pPr>
             <a:r>
-              <a:rPr lang="ru" sz="1500">
+              <a:rPr lang="ru" sz="1500" dirty="0">
                 <a:latin typeface="Roboto"/>
                 <a:ea typeface="Roboto"/>
                 <a:cs typeface="Roboto"/>
@@ -18246,7 +18040,7 @@
               </a:rPr>
               <a:t>Off-topic обсуждаем</a:t>
             </a:r>
-            <a:endParaRPr sz="1500">
+            <a:endParaRPr sz="1500" dirty="0">
               <a:latin typeface="Roboto"/>
               <a:ea typeface="Roboto"/>
               <a:cs typeface="Roboto"/>
@@ -18264,7 +18058,7 @@
               <a:buNone/>
             </a:pPr>
             <a:r>
-              <a:rPr lang="ru" sz="1500">
+              <a:rPr lang="ru" sz="1500" dirty="0">
                 <a:latin typeface="Roboto"/>
                 <a:ea typeface="Roboto"/>
                 <a:cs typeface="Roboto"/>
@@ -18272,42 +18066,7 @@
               </a:rPr>
               <a:t>в учебной группе</a:t>
             </a:r>
-            <a:endParaRPr sz="1500">
-              <a:latin typeface="Roboto"/>
-              <a:ea typeface="Roboto"/>
-              <a:cs typeface="Roboto"/>
-              <a:sym typeface="Roboto"/>
-            </a:endParaRPr>
-          </a:p>
-          <a:p>
-            <a:pPr marL="0" lvl="0" indent="0" algn="l" rtl="0">
-              <a:spcBef>
-                <a:spcPts val="0"/>
-              </a:spcBef>
-              <a:spcAft>
-                <a:spcPts val="0"/>
-              </a:spcAft>
-              <a:buNone/>
-            </a:pPr>
-            <a:r>
-              <a:rPr lang="ru" sz="1500">
-                <a:latin typeface="Roboto"/>
-                <a:ea typeface="Roboto"/>
-                <a:cs typeface="Roboto"/>
-                <a:sym typeface="Roboto"/>
-              </a:rPr>
-              <a:t>#</a:t>
-            </a:r>
-            <a:r>
-              <a:rPr lang="ru" sz="1500" b="1">
-                <a:latin typeface="Roboto"/>
-                <a:ea typeface="Roboto"/>
-                <a:cs typeface="Roboto"/>
-                <a:sym typeface="Roboto"/>
-              </a:rPr>
-              <a:t>Med-AI-2024-04</a:t>
-            </a:r>
-            <a:endParaRPr sz="1500">
+            <a:endParaRPr sz="1500" dirty="0">
               <a:latin typeface="Roboto"/>
               <a:ea typeface="Roboto"/>
               <a:cs typeface="Roboto"/>
@@ -19056,659 +18815,6 @@
 </file>
 
 <file path=ppt/slides/slide5.xml><?xml version="1.0" encoding="utf-8"?>
-<p:sld xmlns:a="http://schemas.openxmlformats.org/drawingml/2006/main" xmlns:r="http://schemas.openxmlformats.org/officeDocument/2006/relationships" xmlns:p="http://schemas.openxmlformats.org/presentationml/2006/main">
-  <p:cSld>
-    <p:spTree>
-      <p:nvGrpSpPr>
-        <p:cNvPr id="1" name="Shape 180"/>
-        <p:cNvGrpSpPr/>
-        <p:nvPr/>
-      </p:nvGrpSpPr>
-      <p:grpSpPr>
-        <a:xfrm>
-          <a:off x="0" y="0"/>
-          <a:ext cx="0" cy="0"/>
-          <a:chOff x="0" y="0"/>
-          <a:chExt cx="0" cy="0"/>
-        </a:xfrm>
-      </p:grpSpPr>
-      <p:sp>
-        <p:nvSpPr>
-          <p:cNvPr id="181" name="Google Shape;181;p35"/>
-          <p:cNvSpPr txBox="1">
-            <a:spLocks noGrp="1"/>
-          </p:cNvSpPr>
-          <p:nvPr>
-            <p:ph type="title"/>
-          </p:nvPr>
-        </p:nvSpPr>
-        <p:spPr>
-          <a:xfrm>
-            <a:off x="500550" y="330724"/>
-            <a:ext cx="8520600" cy="1095900"/>
-          </a:xfrm>
-          <a:prstGeom prst="rect">
-            <a:avLst/>
-          </a:prstGeom>
-        </p:spPr>
-        <p:txBody>
-          <a:bodyPr spcFirstLastPara="1" wrap="square" lIns="91425" tIns="91425" rIns="91425" bIns="91425" anchor="t" anchorCtr="0">
-            <a:noAutofit/>
-          </a:bodyPr>
-          <a:lstStyle/>
-          <a:p>
-            <a:pPr marL="0" lvl="0" indent="0" algn="l" rtl="0">
-              <a:spcBef>
-                <a:spcPts val="0"/>
-              </a:spcBef>
-              <a:spcAft>
-                <a:spcPts val="0"/>
-              </a:spcAft>
-              <a:buNone/>
-            </a:pPr>
-            <a:r>
-              <a:rPr lang="ru"/>
-              <a:t>Карта курса</a:t>
-            </a:r>
-            <a:endParaRPr/>
-          </a:p>
-        </p:txBody>
-      </p:sp>
-      <p:sp>
-        <p:nvSpPr>
-          <p:cNvPr id="182" name="Google Shape;182;p35"/>
-          <p:cNvSpPr/>
-          <p:nvPr/>
-        </p:nvSpPr>
-        <p:spPr>
-          <a:xfrm>
-            <a:off x="5379776" y="974300"/>
-            <a:ext cx="2473200" cy="579300"/>
-          </a:xfrm>
-          <a:prstGeom prst="roundRect">
-            <a:avLst>
-              <a:gd name="adj" fmla="val 16667"/>
-            </a:avLst>
-          </a:prstGeom>
-          <a:solidFill>
-            <a:srgbClr val="FFD966"/>
-          </a:solidFill>
-          <a:ln>
-            <a:noFill/>
-          </a:ln>
-        </p:spPr>
-        <p:txBody>
-          <a:bodyPr spcFirstLastPara="1" wrap="square" lIns="162000" tIns="91425" rIns="162000" bIns="91425" anchor="ctr" anchorCtr="0">
-            <a:noAutofit/>
-          </a:bodyPr>
-          <a:lstStyle/>
-          <a:p>
-            <a:pPr marL="0" lvl="0" indent="0" algn="l" rtl="0">
-              <a:spcBef>
-                <a:spcPts val="0"/>
-              </a:spcBef>
-              <a:spcAft>
-                <a:spcPts val="0"/>
-              </a:spcAft>
-              <a:buNone/>
-            </a:pPr>
-            <a:r>
-              <a:rPr lang="ru" sz="1300">
-                <a:solidFill>
-                  <a:schemeClr val="dk1"/>
-                </a:solidFill>
-                <a:latin typeface="Roboto"/>
-                <a:ea typeface="Roboto"/>
-                <a:cs typeface="Roboto"/>
-                <a:sym typeface="Roboto"/>
-              </a:rPr>
-              <a:t>Введение в проблематику и определение фокуса</a:t>
-            </a:r>
-            <a:endParaRPr sz="1300">
-              <a:solidFill>
-                <a:schemeClr val="dk1"/>
-              </a:solidFill>
-              <a:latin typeface="Roboto"/>
-              <a:ea typeface="Roboto"/>
-              <a:cs typeface="Roboto"/>
-              <a:sym typeface="Roboto"/>
-            </a:endParaRPr>
-          </a:p>
-        </p:txBody>
-      </p:sp>
-      <p:sp>
-        <p:nvSpPr>
-          <p:cNvPr id="183" name="Google Shape;183;p35"/>
-          <p:cNvSpPr/>
-          <p:nvPr/>
-        </p:nvSpPr>
-        <p:spPr>
-          <a:xfrm>
-            <a:off x="1843400" y="1638275"/>
-            <a:ext cx="2527800" cy="579300"/>
-          </a:xfrm>
-          <a:prstGeom prst="roundRect">
-            <a:avLst>
-              <a:gd name="adj" fmla="val 16667"/>
-            </a:avLst>
-          </a:prstGeom>
-          <a:solidFill>
-            <a:srgbClr val="FFD966"/>
-          </a:solidFill>
-          <a:ln>
-            <a:noFill/>
-          </a:ln>
-        </p:spPr>
-        <p:txBody>
-          <a:bodyPr spcFirstLastPara="1" wrap="square" lIns="162000" tIns="91425" rIns="162000" bIns="91425" anchor="ctr" anchorCtr="0">
-            <a:noAutofit/>
-          </a:bodyPr>
-          <a:lstStyle/>
-          <a:p>
-            <a:pPr marL="0" lvl="0" indent="0" algn="l" rtl="0">
-              <a:spcBef>
-                <a:spcPts val="0"/>
-              </a:spcBef>
-              <a:spcAft>
-                <a:spcPts val="0"/>
-              </a:spcAft>
-              <a:buNone/>
-            </a:pPr>
-            <a:r>
-              <a:rPr lang="ru" sz="1300">
-                <a:solidFill>
-                  <a:schemeClr val="dk1"/>
-                </a:solidFill>
-                <a:latin typeface="Roboto"/>
-                <a:ea typeface="Roboto"/>
-                <a:cs typeface="Roboto"/>
-                <a:sym typeface="Roboto"/>
-              </a:rPr>
-              <a:t>Медицинские процессы =&gt;</a:t>
-            </a:r>
-            <a:endParaRPr sz="1300">
-              <a:solidFill>
-                <a:schemeClr val="dk1"/>
-              </a:solidFill>
-              <a:latin typeface="Roboto"/>
-              <a:ea typeface="Roboto"/>
-              <a:cs typeface="Roboto"/>
-              <a:sym typeface="Roboto"/>
-            </a:endParaRPr>
-          </a:p>
-          <a:p>
-            <a:pPr marL="0" lvl="0" indent="0" algn="l" rtl="0">
-              <a:spcBef>
-                <a:spcPts val="0"/>
-              </a:spcBef>
-              <a:spcAft>
-                <a:spcPts val="0"/>
-              </a:spcAft>
-              <a:buNone/>
-            </a:pPr>
-            <a:r>
-              <a:rPr lang="ru" sz="1300">
-                <a:solidFill>
-                  <a:schemeClr val="dk1"/>
-                </a:solidFill>
-                <a:latin typeface="Roboto"/>
-                <a:ea typeface="Roboto"/>
-                <a:cs typeface="Roboto"/>
-                <a:sym typeface="Roboto"/>
-              </a:rPr>
-              <a:t>медицинские данные</a:t>
-            </a:r>
-            <a:endParaRPr sz="1300">
-              <a:solidFill>
-                <a:schemeClr val="dk1"/>
-              </a:solidFill>
-              <a:latin typeface="Roboto"/>
-              <a:ea typeface="Roboto"/>
-              <a:cs typeface="Roboto"/>
-              <a:sym typeface="Roboto"/>
-            </a:endParaRPr>
-          </a:p>
-        </p:txBody>
-      </p:sp>
-      <p:sp>
-        <p:nvSpPr>
-          <p:cNvPr id="184" name="Google Shape;184;p35"/>
-          <p:cNvSpPr/>
-          <p:nvPr/>
-        </p:nvSpPr>
-        <p:spPr>
-          <a:xfrm>
-            <a:off x="5205883" y="1847803"/>
-            <a:ext cx="2203200" cy="579300"/>
-          </a:xfrm>
-          <a:prstGeom prst="roundRect">
-            <a:avLst>
-              <a:gd name="adj" fmla="val 16667"/>
-            </a:avLst>
-          </a:prstGeom>
-          <a:solidFill>
-            <a:srgbClr val="FFD966"/>
-          </a:solidFill>
-          <a:ln>
-            <a:noFill/>
-          </a:ln>
-        </p:spPr>
-        <p:txBody>
-          <a:bodyPr spcFirstLastPara="1" wrap="square" lIns="162000" tIns="91425" rIns="162000" bIns="91425" anchor="ctr" anchorCtr="0">
-            <a:noAutofit/>
-          </a:bodyPr>
-          <a:lstStyle/>
-          <a:p>
-            <a:pPr marL="0" lvl="0" indent="0" algn="l" rtl="0">
-              <a:spcBef>
-                <a:spcPts val="0"/>
-              </a:spcBef>
-              <a:spcAft>
-                <a:spcPts val="0"/>
-              </a:spcAft>
-              <a:buNone/>
-            </a:pPr>
-            <a:r>
-              <a:rPr lang="ru" sz="1300">
-                <a:solidFill>
-                  <a:schemeClr val="dk1"/>
-                </a:solidFill>
-                <a:latin typeface="Roboto"/>
-                <a:ea typeface="Roboto"/>
-                <a:cs typeface="Roboto"/>
-                <a:sym typeface="Roboto"/>
-              </a:rPr>
-              <a:t>Медицинские данные =&gt; датасеты</a:t>
-            </a:r>
-            <a:endParaRPr sz="1300">
-              <a:solidFill>
-                <a:schemeClr val="dk1"/>
-              </a:solidFill>
-              <a:latin typeface="Roboto"/>
-              <a:ea typeface="Roboto"/>
-              <a:cs typeface="Roboto"/>
-              <a:sym typeface="Roboto"/>
-            </a:endParaRPr>
-          </a:p>
-        </p:txBody>
-      </p:sp>
-      <p:sp>
-        <p:nvSpPr>
-          <p:cNvPr id="185" name="Google Shape;185;p35"/>
-          <p:cNvSpPr/>
-          <p:nvPr/>
-        </p:nvSpPr>
-        <p:spPr>
-          <a:xfrm>
-            <a:off x="1116500" y="3022738"/>
-            <a:ext cx="2970600" cy="579300"/>
-          </a:xfrm>
-          <a:prstGeom prst="roundRect">
-            <a:avLst>
-              <a:gd name="adj" fmla="val 16667"/>
-            </a:avLst>
-          </a:prstGeom>
-          <a:solidFill>
-            <a:srgbClr val="FFD966"/>
-          </a:solidFill>
-          <a:ln>
-            <a:noFill/>
-          </a:ln>
-        </p:spPr>
-        <p:txBody>
-          <a:bodyPr spcFirstLastPara="1" wrap="square" lIns="162000" tIns="91425" rIns="162000" bIns="91425" anchor="ctr" anchorCtr="0">
-            <a:noAutofit/>
-          </a:bodyPr>
-          <a:lstStyle/>
-          <a:p>
-            <a:pPr marL="0" lvl="0" indent="0" algn="l" rtl="0">
-              <a:spcBef>
-                <a:spcPts val="0"/>
-              </a:spcBef>
-              <a:spcAft>
-                <a:spcPts val="0"/>
-              </a:spcAft>
-              <a:buNone/>
-            </a:pPr>
-            <a:r>
-              <a:rPr lang="ru" sz="1300">
-                <a:solidFill>
-                  <a:schemeClr val="dk1"/>
-                </a:solidFill>
-                <a:latin typeface="Roboto"/>
-                <a:ea typeface="Roboto"/>
-                <a:cs typeface="Roboto"/>
-                <a:sym typeface="Roboto"/>
-              </a:rPr>
-              <a:t>Готовая модель =&gt; валидация, упаковка, внедрение, ??, PROFIT</a:t>
-            </a:r>
-            <a:endParaRPr sz="1300">
-              <a:solidFill>
-                <a:schemeClr val="dk1"/>
-              </a:solidFill>
-              <a:latin typeface="Roboto"/>
-              <a:ea typeface="Roboto"/>
-              <a:cs typeface="Roboto"/>
-              <a:sym typeface="Roboto"/>
-            </a:endParaRPr>
-          </a:p>
-        </p:txBody>
-      </p:sp>
-      <p:sp>
-        <p:nvSpPr>
-          <p:cNvPr id="186" name="Google Shape;186;p35"/>
-          <p:cNvSpPr/>
-          <p:nvPr/>
-        </p:nvSpPr>
-        <p:spPr>
-          <a:xfrm>
-            <a:off x="5840300" y="2778634"/>
-            <a:ext cx="2473200" cy="579300"/>
-          </a:xfrm>
-          <a:prstGeom prst="roundRect">
-            <a:avLst>
-              <a:gd name="adj" fmla="val 16667"/>
-            </a:avLst>
-          </a:prstGeom>
-          <a:solidFill>
-            <a:srgbClr val="FFD966"/>
-          </a:solidFill>
-          <a:ln>
-            <a:noFill/>
-          </a:ln>
-        </p:spPr>
-        <p:txBody>
-          <a:bodyPr spcFirstLastPara="1" wrap="square" lIns="162000" tIns="91425" rIns="162000" bIns="91425" anchor="ctr" anchorCtr="0">
-            <a:noAutofit/>
-          </a:bodyPr>
-          <a:lstStyle/>
-          <a:p>
-            <a:pPr marL="0" lvl="0" indent="0" algn="l" rtl="0">
-              <a:spcBef>
-                <a:spcPts val="0"/>
-              </a:spcBef>
-              <a:spcAft>
-                <a:spcPts val="0"/>
-              </a:spcAft>
-              <a:buNone/>
-            </a:pPr>
-            <a:r>
-              <a:rPr lang="ru" sz="1300">
-                <a:solidFill>
-                  <a:schemeClr val="dk1"/>
-                </a:solidFill>
-                <a:latin typeface="Roboto"/>
-                <a:ea typeface="Roboto"/>
-                <a:cs typeface="Roboto"/>
-                <a:sym typeface="Roboto"/>
-              </a:rPr>
-              <a:t>Датасеты =&gt; машинное обучение</a:t>
-            </a:r>
-            <a:endParaRPr sz="1300">
-              <a:solidFill>
-                <a:schemeClr val="dk1"/>
-              </a:solidFill>
-              <a:latin typeface="Roboto"/>
-              <a:ea typeface="Roboto"/>
-              <a:cs typeface="Roboto"/>
-              <a:sym typeface="Roboto"/>
-            </a:endParaRPr>
-          </a:p>
-        </p:txBody>
-      </p:sp>
-      <p:cxnSp>
-        <p:nvCxnSpPr>
-          <p:cNvPr id="187" name="Google Shape;187;p35"/>
-          <p:cNvCxnSpPr>
-            <a:stCxn id="183" idx="3"/>
-            <a:endCxn id="184" idx="1"/>
-          </p:cNvCxnSpPr>
-          <p:nvPr/>
-        </p:nvCxnSpPr>
-        <p:spPr>
-          <a:xfrm>
-            <a:off x="4371200" y="1927925"/>
-            <a:ext cx="834600" cy="209400"/>
-          </a:xfrm>
-          <a:prstGeom prst="curvedConnector3">
-            <a:avLst>
-              <a:gd name="adj1" fmla="val 50005"/>
-            </a:avLst>
-          </a:prstGeom>
-          <a:noFill/>
-          <a:ln w="9525" cap="flat" cmpd="sng">
-            <a:solidFill>
-              <a:schemeClr val="dk1"/>
-            </a:solidFill>
-            <a:prstDash val="dash"/>
-            <a:round/>
-            <a:headEnd type="none" w="med" len="med"/>
-            <a:tailEnd type="none" w="med" len="med"/>
-          </a:ln>
-        </p:spPr>
-      </p:cxnSp>
-      <p:cxnSp>
-        <p:nvCxnSpPr>
-          <p:cNvPr id="188" name="Google Shape;188;p35"/>
-          <p:cNvCxnSpPr>
-            <a:stCxn id="182" idx="1"/>
-            <a:endCxn id="183" idx="1"/>
-          </p:cNvCxnSpPr>
-          <p:nvPr/>
-        </p:nvCxnSpPr>
-        <p:spPr>
-          <a:xfrm flipH="1">
-            <a:off x="1843376" y="1263950"/>
-            <a:ext cx="3536400" cy="663900"/>
-          </a:xfrm>
-          <a:prstGeom prst="curvedConnector3">
-            <a:avLst>
-              <a:gd name="adj1" fmla="val 106733"/>
-            </a:avLst>
-          </a:prstGeom>
-          <a:noFill/>
-          <a:ln w="9525" cap="flat" cmpd="sng">
-            <a:solidFill>
-              <a:schemeClr val="dk1"/>
-            </a:solidFill>
-            <a:prstDash val="dash"/>
-            <a:round/>
-            <a:headEnd type="none" w="med" len="med"/>
-            <a:tailEnd type="none" w="med" len="med"/>
-          </a:ln>
-        </p:spPr>
-      </p:cxnSp>
-      <p:sp>
-        <p:nvSpPr>
-          <p:cNvPr id="189" name="Google Shape;189;p35"/>
-          <p:cNvSpPr/>
-          <p:nvPr/>
-        </p:nvSpPr>
-        <p:spPr>
-          <a:xfrm>
-            <a:off x="2809700" y="4031600"/>
-            <a:ext cx="3083700" cy="579300"/>
-          </a:xfrm>
-          <a:prstGeom prst="roundRect">
-            <a:avLst>
-              <a:gd name="adj" fmla="val 16667"/>
-            </a:avLst>
-          </a:prstGeom>
-          <a:solidFill>
-            <a:srgbClr val="FFD966"/>
-          </a:solidFill>
-          <a:ln>
-            <a:noFill/>
-          </a:ln>
-        </p:spPr>
-        <p:txBody>
-          <a:bodyPr spcFirstLastPara="1" wrap="square" lIns="162000" tIns="91425" rIns="162000" bIns="91425" anchor="ctr" anchorCtr="0">
-            <a:noAutofit/>
-          </a:bodyPr>
-          <a:lstStyle/>
-          <a:p>
-            <a:pPr marL="0" lvl="0" indent="0" algn="l" rtl="0">
-              <a:spcBef>
-                <a:spcPts val="0"/>
-              </a:spcBef>
-              <a:spcAft>
-                <a:spcPts val="0"/>
-              </a:spcAft>
-              <a:buNone/>
-            </a:pPr>
-            <a:r>
-              <a:rPr lang="ru" sz="1300">
-                <a:solidFill>
-                  <a:schemeClr val="dk1"/>
-                </a:solidFill>
-                <a:latin typeface="Roboto"/>
-                <a:ea typeface="Roboto"/>
-                <a:cs typeface="Roboto"/>
-                <a:sym typeface="Roboto"/>
-              </a:rPr>
-              <a:t>Собственный проект</a:t>
-            </a:r>
-            <a:endParaRPr sz="1300">
-              <a:solidFill>
-                <a:schemeClr val="dk1"/>
-              </a:solidFill>
-              <a:latin typeface="Roboto"/>
-              <a:ea typeface="Roboto"/>
-              <a:cs typeface="Roboto"/>
-              <a:sym typeface="Roboto"/>
-            </a:endParaRPr>
-          </a:p>
-        </p:txBody>
-      </p:sp>
-      <p:cxnSp>
-        <p:nvCxnSpPr>
-          <p:cNvPr id="190" name="Google Shape;190;p35"/>
-          <p:cNvCxnSpPr>
-            <a:stCxn id="184" idx="3"/>
-            <a:endCxn id="186" idx="3"/>
-          </p:cNvCxnSpPr>
-          <p:nvPr/>
-        </p:nvCxnSpPr>
-        <p:spPr>
-          <a:xfrm>
-            <a:off x="7409083" y="2137453"/>
-            <a:ext cx="904500" cy="930900"/>
-          </a:xfrm>
-          <a:prstGeom prst="curvedConnector3">
-            <a:avLst>
-              <a:gd name="adj1" fmla="val 126318"/>
-            </a:avLst>
-          </a:prstGeom>
-          <a:noFill/>
-          <a:ln w="9525" cap="flat" cmpd="sng">
-            <a:solidFill>
-              <a:schemeClr val="dk1"/>
-            </a:solidFill>
-            <a:prstDash val="dash"/>
-            <a:round/>
-            <a:headEnd type="none" w="med" len="med"/>
-            <a:tailEnd type="none" w="med" len="med"/>
-          </a:ln>
-        </p:spPr>
-      </p:cxnSp>
-      <p:cxnSp>
-        <p:nvCxnSpPr>
-          <p:cNvPr id="191" name="Google Shape;191;p35"/>
-          <p:cNvCxnSpPr>
-            <a:stCxn id="186" idx="1"/>
-            <a:endCxn id="185" idx="3"/>
-          </p:cNvCxnSpPr>
-          <p:nvPr/>
-        </p:nvCxnSpPr>
-        <p:spPr>
-          <a:xfrm flipH="1">
-            <a:off x="4087100" y="3068284"/>
-            <a:ext cx="1753200" cy="244200"/>
-          </a:xfrm>
-          <a:prstGeom prst="curvedConnector3">
-            <a:avLst>
-              <a:gd name="adj1" fmla="val 50000"/>
-            </a:avLst>
-          </a:prstGeom>
-          <a:noFill/>
-          <a:ln w="9525" cap="flat" cmpd="sng">
-            <a:solidFill>
-              <a:schemeClr val="dk1"/>
-            </a:solidFill>
-            <a:prstDash val="dash"/>
-            <a:round/>
-            <a:headEnd type="none" w="med" len="med"/>
-            <a:tailEnd type="none" w="med" len="med"/>
-          </a:ln>
-        </p:spPr>
-      </p:cxnSp>
-      <p:cxnSp>
-        <p:nvCxnSpPr>
-          <p:cNvPr id="192" name="Google Shape;192;p35"/>
-          <p:cNvCxnSpPr>
-            <a:stCxn id="185" idx="1"/>
-            <a:endCxn id="189" idx="1"/>
-          </p:cNvCxnSpPr>
-          <p:nvPr/>
-        </p:nvCxnSpPr>
-        <p:spPr>
-          <a:xfrm>
-            <a:off x="1116500" y="3312388"/>
-            <a:ext cx="1693200" cy="1008900"/>
-          </a:xfrm>
-          <a:prstGeom prst="curvedConnector3">
-            <a:avLst>
-              <a:gd name="adj1" fmla="val -14064"/>
-            </a:avLst>
-          </a:prstGeom>
-          <a:noFill/>
-          <a:ln w="9525" cap="flat" cmpd="sng">
-            <a:solidFill>
-              <a:schemeClr val="dk1"/>
-            </a:solidFill>
-            <a:prstDash val="dash"/>
-            <a:round/>
-            <a:headEnd type="none" w="med" len="med"/>
-            <a:tailEnd type="none" w="med" len="med"/>
-          </a:ln>
-        </p:spPr>
-      </p:cxnSp>
-      <p:pic>
-        <p:nvPicPr>
-          <p:cNvPr id="193" name="Google Shape;193;p35"/>
-          <p:cNvPicPr preferRelativeResize="0"/>
-          <p:nvPr/>
-        </p:nvPicPr>
-        <p:blipFill rotWithShape="1">
-          <a:blip r:embed="rId3">
-            <a:alphaModFix/>
-          </a:blip>
-          <a:srcRect/>
-          <a:stretch/>
-        </p:blipFill>
-        <p:spPr>
-          <a:xfrm>
-            <a:off x="6141203" y="1553597"/>
-            <a:ext cx="416073" cy="416072"/>
-          </a:xfrm>
-          <a:prstGeom prst="rect">
-            <a:avLst/>
-          </a:prstGeom>
-          <a:noFill/>
-          <a:ln>
-            <a:noFill/>
-          </a:ln>
-        </p:spPr>
-      </p:pic>
-    </p:spTree>
-  </p:cSld>
-  <p:clrMapOvr>
-    <a:masterClrMapping/>
-  </p:clrMapOvr>
-</p:sld>
-</file>
-
-<file path=ppt/slides/slide6.xml><?xml version="1.0" encoding="utf-8"?>
 <p:sld xmlns:a="http://schemas.openxmlformats.org/drawingml/2006/main" xmlns:r="http://schemas.openxmlformats.org/officeDocument/2006/relationships" xmlns:p="http://schemas.openxmlformats.org/presentationml/2006/main">
   <p:cSld>
     <p:spTree>
@@ -20513,7 +19619,7 @@
 </p:sld>
 </file>
 
-<file path=ppt/slides/slide7.xml><?xml version="1.0" encoding="utf-8"?>
+<file path=ppt/slides/slide6.xml><?xml version="1.0" encoding="utf-8"?>
 <p:sld xmlns:a="http://schemas.openxmlformats.org/drawingml/2006/main" xmlns:r="http://schemas.openxmlformats.org/officeDocument/2006/relationships" xmlns:p="http://schemas.openxmlformats.org/presentationml/2006/main">
   <p:cSld>
     <p:spTree>
@@ -20580,7 +19686,7 @@
 </p:sld>
 </file>
 
-<file path=ppt/slides/slide8.xml><?xml version="1.0" encoding="utf-8"?>
+<file path=ppt/slides/slide7.xml><?xml version="1.0" encoding="utf-8"?>
 <p:sld xmlns:a="http://schemas.openxmlformats.org/drawingml/2006/main" xmlns:r="http://schemas.openxmlformats.org/officeDocument/2006/relationships" xmlns:p="http://schemas.openxmlformats.org/presentationml/2006/main">
   <p:cSld>
     <p:spTree>
@@ -21738,7 +20844,7 @@
 </p:sld>
 </file>
 
-<file path=ppt/slides/slide9.xml><?xml version="1.0" encoding="utf-8"?>
+<file path=ppt/slides/slide8.xml><?xml version="1.0" encoding="utf-8"?>
 <p:sld xmlns:a="http://schemas.openxmlformats.org/drawingml/2006/main" xmlns:r="http://schemas.openxmlformats.org/officeDocument/2006/relationships" xmlns:p="http://schemas.openxmlformats.org/presentationml/2006/main">
   <p:cSld>
     <p:spTree>
@@ -22028,6 +21134,73 @@
               <a:cs typeface="Roboto"/>
               <a:sym typeface="Roboto"/>
             </a:endParaRPr>
+          </a:p>
+        </p:txBody>
+      </p:sp>
+    </p:spTree>
+  </p:cSld>
+  <p:clrMapOvr>
+    <a:masterClrMapping/>
+  </p:clrMapOvr>
+</p:sld>
+</file>
+
+<file path=ppt/slides/slide9.xml><?xml version="1.0" encoding="utf-8"?>
+<p:sld xmlns:a="http://schemas.openxmlformats.org/drawingml/2006/main" xmlns:r="http://schemas.openxmlformats.org/officeDocument/2006/relationships" xmlns:p="http://schemas.openxmlformats.org/presentationml/2006/main">
+  <p:cSld>
+    <p:spTree>
+      <p:nvGrpSpPr>
+        <p:cNvPr id="1" name="Shape 489"/>
+        <p:cNvGrpSpPr/>
+        <p:nvPr/>
+      </p:nvGrpSpPr>
+      <p:grpSpPr>
+        <a:xfrm>
+          <a:off x="0" y="0"/>
+          <a:ext cx="0" cy="0"/>
+          <a:chOff x="0" y="0"/>
+          <a:chExt cx="0" cy="0"/>
+        </a:xfrm>
+      </p:grpSpPr>
+      <p:sp>
+        <p:nvSpPr>
+          <p:cNvPr id="490" name="Google Shape;490;p72"/>
+          <p:cNvSpPr txBox="1">
+            <a:spLocks noGrp="1"/>
+          </p:cNvSpPr>
+          <p:nvPr>
+            <p:ph type="title"/>
+          </p:nvPr>
+        </p:nvSpPr>
+        <p:spPr>
+          <a:xfrm>
+            <a:off x="651425" y="396394"/>
+            <a:ext cx="7706100" cy="4090800"/>
+          </a:xfrm>
+          <a:prstGeom prst="rect">
+            <a:avLst/>
+          </a:prstGeom>
+        </p:spPr>
+        <p:txBody>
+          <a:bodyPr spcFirstLastPara="1" wrap="square" lIns="91425" tIns="91425" rIns="91425" bIns="91425" anchor="ctr" anchorCtr="0">
+            <a:noAutofit/>
+          </a:bodyPr>
+          <a:lstStyle/>
+          <a:p>
+            <a:pPr marL="0" lvl="0" indent="0" algn="l" rtl="0">
+              <a:spcBef>
+                <a:spcPts val="0"/>
+              </a:spcBef>
+              <a:spcAft>
+                <a:spcPts val="0"/>
+              </a:spcAft>
+              <a:buNone/>
+            </a:pPr>
+            <a:r>
+              <a:rPr lang="ru"/>
+              <a:t>Рефлексия</a:t>
+            </a:r>
+            <a:endParaRPr/>
           </a:p>
         </p:txBody>
       </p:sp>
